--- a/docs/specs/006-validacion-pitch-entrega/materiales/pitch-v8-revision.pptx
+++ b/docs/specs/006-validacion-pitch-entrega/materiales/pitch-v8-revision.pptx
@@ -1041,7 +1041,7 @@
           </a:p>
           <a:p>
             <a:r>
-              <a:t>Con honestidad. Construido: de la alerta a la prueba de entrega. Probado: la decisión A, B y C en un ensayo técnico sobre un escenario sintético de Quito de 40 puntos, y una corrida del agente de inteligencia artificial, incluida su caída al respaldo. Siguiente fase: usarlo en una empresa real, cargar sus datos y medir contra su línea base, y llevar la comparación A, B y C a producción.</a:t>
+              <a:t>Construido: de la alerta a la prueba de entrega. Ensayado: la decisión A, B y C en un ensayo técnico sobre un escenario sintético de Quito de 40 puntos, y una corrida del agente de inteligencia artificial, incluida su caída al respaldo. Siguiente fase: usarlo en una empresa real, cargar sus datos y medir contra su línea base, probar el recorrido sin señal en un teléfono real, y llevar la comparación A, B y C a producción.</a:t>
             </a:r>
           </a:p>
         </p:txBody>
@@ -4594,7 +4594,7 @@
                 </a:solidFill>
                 <a:latin typeface="Open Sans"/>
               </a:rPr>
-              <a:t>¡Hola! Soy Chillo: usamos </a:t>
+              <a:t>¡Hola! Soy Chillo: el motor </a:t>
             </a:r>
             <a:r>
               <a:rPr sz="1500" b="1" i="0">
@@ -4603,7 +4603,7 @@
                 </a:solidFill>
                 <a:latin typeface="Open Sans"/>
               </a:rPr>
-              <a:t>IA para planificar rutas</a:t>
+              <a:t>calcula y la IA explica</a:t>
             </a:r>
             <a:r>
               <a:rPr sz="1500" b="1" i="0">
@@ -4612,7 +4612,7 @@
                 </a:solidFill>
                 <a:latin typeface="Open Sans"/>
               </a:rPr>
-              <a:t> y llegar antes que la llamada.</a:t>
+              <a:t> para llegar antes que la llamada.</a:t>
             </a:r>
           </a:p>
         </p:txBody>
@@ -6308,7 +6308,7 @@
                 </a:solidFill>
                 <a:latin typeface="Open Sans"/>
               </a:rPr>
-              <a:t>Fuente: ensayo técnico #285 (demo-quito-planificacion): 4 pedidos, 6 entregas críticas; opciones A, B y C de 02-suggest-pitch-abc.json · matriz P-02, P-04, P-05. Escenario sintético: no son clientes ni operaciones medidas.</a:t>
+              <a:t>Fuente: ensayo técnico del motor sobre un escenario sintético de Quito: 4 pedidos, 6 entregas críticas, opciones A, B y C. No son clientes ni operaciones medidas.</a:t>
             </a:r>
           </a:p>
         </p:txBody>
@@ -9068,7 +9068,7 @@
                 </a:solidFill>
                 <a:latin typeface="Open Sans"/>
               </a:rPr>
-              <a:t>Fuente: ensayo técnico #285 (PR #295, 1585ab7), 02-suggest-pitch-abc.json · demo-quito-planificacion, corrida local 17-oct · 4 pedidos, 6 entregas críticas, 55,9 km · diésel USD 3,11/gal (Primicias, 12-oct) · matriz P-02.</a:t>
+              <a:t>Fuente: ensayo técnico local del motor, 17-oct · escenario sintético de Quito · 4 pedidos, 6 entregas críticas, 55,9 km · diésel USD 3,11/gal (Primicias, 12-oct). Una sola corrida, sin clientes reales.</a:t>
             </a:r>
           </a:p>
         </p:txBody>
@@ -12953,7 +12953,7 @@
                 </a:solidFill>
                 <a:latin typeface="Open Sans"/>
               </a:rPr>
-              <a:t>Fuente: matriz A-02 (hipótesis del sector), A-06, A-08, A-10, A-11 y A-12 (run n8n 292, respaldo sin IA). Lo del sector es lo que escuchamos, no una medición.</a:t>
+              <a:t>Fuente: lo del sector es lo que escuchamos en la charla, no una medición. Una corrida registrada del agente incluyó su caída a la explicación de respaldo.</a:t>
             </a:r>
           </a:p>
         </p:txBody>
@@ -14088,7 +14088,7 @@
                 </a:solidFill>
                 <a:latin typeface="Open Sans"/>
               </a:rPr>
-              <a:t>Fuente: matriz de afirmaciones P-02, P-04, P-05, A-03, A-11, A-12, A-13, A-15, A-21 y #198. Escenario sintético de Quito: 40 puntos, no son clientes.</a:t>
+              <a:t>Fuente: escenario sintético de Quito: 40 puntos, no son clientes. El recorrido sin señal está construido y aún no se ensayó en un teléfono real.</a:t>
             </a:r>
           </a:p>
         </p:txBody>
@@ -14410,7 +14410,7 @@
                   </a:solidFill>
                   <a:latin typeface="Oswald"/>
                 </a:rPr>
-                <a:t>PROBADO</a:t>
+                <a:t>ENSAYADO</a:t>
               </a:r>
             </a:p>
           </p:txBody>
@@ -14628,6 +14628,25 @@
                   <a:latin typeface="Open Sans"/>
                 </a:rPr>
                 <a:t>•  Usarlo en una empresa real: cargar sus datos y medir contra su línea base</a:t>
+              </a:r>
+            </a:p>
+            <a:p>
+              <a:pPr algn="l">
+                <a:lnSpc>
+                  <a:spcPct val="105000"/>
+                </a:lnSpc>
+                <a:spcAft>
+                  <a:spcPts val="800"/>
+                </a:spcAft>
+              </a:pPr>
+              <a:r>
+                <a:rPr sz="1550" b="1" i="0">
+                  <a:solidFill>
+                    <a:srgbClr val="E6D7A3"/>
+                  </a:solidFill>
+                  <a:latin typeface="Open Sans"/>
+                </a:rPr>
+                <a:t>•  Probar el recorrido sin señal en un teléfono real</a:t>
               </a:r>
             </a:p>
             <a:p>
@@ -15289,7 +15308,7 @@
                 </a:solidFill>
                 <a:latin typeface="Open Sans"/>
               </a:rPr>
-              <a:t>Fuente: matriz A-21 (sin ahorro prometido), A-26 y A-30 (costo y precio por validar), A-31 (modelo), P-07 (indicadores en curso); pantalla Reportes (código en develop, sin ensayo de la escena). Sujeto a validación.</a:t>
+              <a:t>Fuente: sin ahorro prometido; costo y precio por validar en el piloto; modelo como hipótesis. La sección Reportes existe en el sistema, sin ensayo de la escena.</a:t>
             </a:r>
           </a:p>
         </p:txBody>
@@ -16837,7 +16856,7 @@
                 </a:solidFill>
                 <a:latin typeface="Open Sans"/>
               </a:rPr>
-              <a:t>Fuente: matriz A-21, A-32 y P-02. Propuesta sin contraparte confirmada; sujeta a validación.</a:t>
+              <a:t>Fuente: propuesta sin contraparte confirmada ni cliente comprometido; sujeta a validación.</a:t>
             </a:r>
           </a:p>
         </p:txBody>

--- a/docs/specs/006-validacion-pitch-entrega/materiales/pitch-v8-revision.pptx
+++ b/docs/specs/006-validacion-pitch-entrega/materiales/pitch-v8-revision.pptx
@@ -591,7 +591,7 @@
           </a:p>
           <a:p>
             <a:r>
-              <a:t>Escaneen el QR y entren con la cuenta del jurado. Amazon Cognito, el servicio de acceso de Amazon en la nube, valida su identidad. Ustedes pueden consultar como auditores, sin modificar la operación. La conexión va cifrada. Dejamos esta pantalla para sus preguntas.</a:t>
+              <a:t>Escaneen el QR y entren con este usuario y clave. El acceso usa AWS Cognito en la nube de Amazon, con conexión cifrada. Entran como auditores: pueden ver todo el sistema sin modificar datos. Dejamos la pantalla para sus preguntas.</a:t>
             </a:r>
           </a:p>
         </p:txBody>
@@ -5387,7 +5387,7 @@
         <p:spPr>
           <a:xfrm>
             <a:off x="5138928" y="1837943"/>
-            <a:ext cx="6135624" cy="210312"/>
+            <a:ext cx="1143000" cy="219456"/>
           </a:xfrm>
           <a:prstGeom prst="rect">
             <a:avLst/>
@@ -5412,7 +5412,7 @@
                 </a:solidFill>
                 <a:latin typeface="Open Sans"/>
               </a:rPr>
-              <a:t>USUARIO DEL JURADO</a:t>
+              <a:t>Usuario</a:t>
             </a:r>
           </a:p>
         </p:txBody>
@@ -5425,8 +5425,8 @@
         </p:nvSpPr>
         <p:spPr>
           <a:xfrm>
-            <a:off x="5138928" y="2093976"/>
-            <a:ext cx="6135624" cy="374904"/>
+            <a:off x="6355080" y="1792224"/>
+            <a:ext cx="4919472" cy="384048"/>
           </a:xfrm>
           <a:prstGeom prst="rect">
             <a:avLst/>
@@ -5451,7 +5451,7 @@
                 </a:solidFill>
                 <a:latin typeface="Open Sans"/>
               </a:rPr>
-              <a:t>jurado@istpetdev.doicela.dev</a:t>
+              <a:t>jurado@expo.ec</a:t>
             </a:r>
           </a:p>
         </p:txBody>
@@ -5464,7 +5464,7 @@
         </p:nvSpPr>
         <p:spPr>
           <a:xfrm>
-            <a:off x="5138928" y="2560320"/>
+            <a:off x="5138928" y="2331720"/>
             <a:ext cx="1143000" cy="219456"/>
           </a:xfrm>
           <a:prstGeom prst="rect">
@@ -5490,7 +5490,7 @@
                 </a:solidFill>
                 <a:latin typeface="Open Sans"/>
               </a:rPr>
-              <a:t>Contraseña</a:t>
+              <a:t>Clave</a:t>
             </a:r>
           </a:p>
         </p:txBody>
@@ -5503,7 +5503,7 @@
         </p:nvSpPr>
         <p:spPr>
           <a:xfrm>
-            <a:off x="6355080" y="2514600"/>
+            <a:off x="6355080" y="2286000"/>
             <a:ext cx="4919472" cy="384048"/>
           </a:xfrm>
           <a:prstGeom prst="rect">
@@ -5523,7 +5523,7 @@
               </a:spcAft>
             </a:pPr>
             <a:r>
-              <a:rPr sz="2200" b="1" i="0">
+              <a:rPr sz="2300" b="1" i="0">
                 <a:solidFill>
                   <a:srgbClr val="FFFFFF"/>
                 </a:solidFill>
@@ -5542,7 +5542,7 @@
         </p:nvSpPr>
         <p:spPr>
           <a:xfrm>
-            <a:off x="5138928" y="2926080"/>
+            <a:off x="5138928" y="2880360"/>
             <a:ext cx="6135624" cy="228600"/>
           </a:xfrm>
           <a:prstGeom prst="rect">
@@ -5568,7 +5568,7 @@
                 </a:solidFill>
                 <a:latin typeface="Open Sans"/>
               </a:rPr>
-              <a:t>Torre de Control → usar esta cuenta</a:t>
+              <a:t>Botón: Torre de Control · Rol Auditor (solo lectura)</a:t>
             </a:r>
           </a:p>
         </p:txBody>
@@ -5607,7 +5607,7 @@
                 </a:solidFill>
                 <a:latin typeface="Open Sans"/>
               </a:rPr>
-              <a:t>SEGURIDAD, EN PALABRAS SENCILLAS</a:t>
+              <a:t>SEGURIDAD · AWS COGNITO (NUBE)</a:t>
             </a:r>
           </a:p>
         </p:txBody>
@@ -5646,7 +5646,7 @@
                 </a:solidFill>
                 <a:latin typeface="Open Sans"/>
               </a:rPr>
-              <a:t>01  Amazon Cognito es el servicio de acceso de AWS.</a:t>
+              <a:t>01  AWS Cognito valida el ingreso en la nube de Amazon.</a:t>
             </a:r>
           </a:p>
         </p:txBody>
@@ -5685,7 +5685,7 @@
                 </a:solidFill>
                 <a:latin typeface="Open Sans"/>
               </a:rPr>
-              <a:t>02  AWS es la nube de Amazon: funciona por Internet.</a:t>
+              <a:t>02  Verifica usuario y clave antes de abrir el sistema.</a:t>
             </a:r>
           </a:p>
         </p:txBody>
@@ -5724,7 +5724,7 @@
                 </a:solidFill>
                 <a:latin typeface="Open Sans"/>
               </a:rPr>
-              <a:t>03  Cognito comprueba el usuario y la contraseña.</a:t>
+              <a:t>03  La clave la protege Cognito, no nuestra base.</a:t>
             </a:r>
           </a:p>
         </p:txBody>
@@ -5763,7 +5763,7 @@
                 </a:solidFill>
                 <a:latin typeface="Open Sans"/>
               </a:rPr>
-              <a:t>04  La contraseña la gestiona Cognito.</a:t>
+              <a:t>04  Al entrar entrega una sesión temporal.</a:t>
             </a:r>
           </a:p>
         </p:txBody>
@@ -5802,7 +5802,7 @@
                 </a:solidFill>
                 <a:latin typeface="Open Sans"/>
               </a:rPr>
-              <a:t>05  La aplicación recibe una sesión temporal.</a:t>
+              <a:t>05  La conexión viaja cifrada por HTTPS.</a:t>
             </a:r>
           </a:p>
         </p:txBody>
@@ -5841,7 +5841,7 @@
                 </a:solidFill>
                 <a:latin typeface="Open Sans"/>
               </a:rPr>
-              <a:t>06  Cada cuenta tiene permisos según su función.</a:t>
+              <a:t>06  Cada cuenta tiene permisos según su rol.</a:t>
             </a:r>
           </a:p>
         </p:txBody>
@@ -5880,7 +5880,7 @@
                 </a:solidFill>
                 <a:latin typeface="Open Sans"/>
               </a:rPr>
-              <a:t>07  El jurado entra con el rol Auditor.</a:t>
+              <a:t>07  El jurado entra con rol Auditor.</a:t>
             </a:r>
           </a:p>
         </p:txBody>
@@ -5919,7 +5919,7 @@
                 </a:solidFill>
                 <a:latin typeface="Open Sans"/>
               </a:rPr>
-              <a:t>08  Puede consultar; no modificar la operación.</a:t>
+              <a:t>08  Modo solo lectura: ver todo sin alterar datos.</a:t>
             </a:r>
           </a:p>
         </p:txBody>
@@ -5958,7 +5958,7 @@
                 </a:solidFill>
                 <a:latin typeface="Open Sans"/>
               </a:rPr>
-              <a:t>09  La conexión usa HTTPS para cifrar los datos.</a:t>
+              <a:t>09  El servidor bloquea cualquier intento de edición.</a:t>
             </a:r>
           </a:p>
         </p:txBody>
@@ -5997,7 +5997,7 @@
                 </a:solidFill>
                 <a:latin typeface="Open Sans"/>
               </a:rPr>
-              <a:t>10  La cuenta puede desactivarse al terminar.</a:t>
+              <a:t>10  La cuenta se desactiva al cerrar la evaluación.</a:t>
             </a:r>
           </a:p>
         </p:txBody>
